--- a/figures/Supplemental_Figures/Supp_Figure3_case3.pptx
+++ b/figures/Supplemental_Figures/Supp_Figure3_case3.pptx
@@ -243,7 +243,7 @@
           <a:p>
             <a:fld id="{87E01EA0-C669-8E49-B514-2D71DDB9C976}" type="datetimeFigureOut">
               <a:rPr lang="en-US" smtClean="0"/>
-              <a:t>7/31/26</a:t>
+              <a:t>9/3/26</a:t>
             </a:fld>
             <a:endParaRPr lang="en-US"/>
           </a:p>
@@ -413,7 +413,7 @@
           <a:p>
             <a:fld id="{87E01EA0-C669-8E49-B514-2D71DDB9C976}" type="datetimeFigureOut">
               <a:rPr lang="en-US" smtClean="0"/>
-              <a:t>7/31/26</a:t>
+              <a:t>9/3/26</a:t>
             </a:fld>
             <a:endParaRPr lang="en-US"/>
           </a:p>
@@ -593,7 +593,7 @@
           <a:p>
             <a:fld id="{87E01EA0-C669-8E49-B514-2D71DDB9C976}" type="datetimeFigureOut">
               <a:rPr lang="en-US" smtClean="0"/>
-              <a:t>7/31/26</a:t>
+              <a:t>9/3/26</a:t>
             </a:fld>
             <a:endParaRPr lang="en-US"/>
           </a:p>
@@ -763,7 +763,7 @@
           <a:p>
             <a:fld id="{87E01EA0-C669-8E49-B514-2D71DDB9C976}" type="datetimeFigureOut">
               <a:rPr lang="en-US" smtClean="0"/>
-              <a:t>7/31/26</a:t>
+              <a:t>9/3/26</a:t>
             </a:fld>
             <a:endParaRPr lang="en-US"/>
           </a:p>
@@ -1009,7 +1009,7 @@
           <a:p>
             <a:fld id="{87E01EA0-C669-8E49-B514-2D71DDB9C976}" type="datetimeFigureOut">
               <a:rPr lang="en-US" smtClean="0"/>
-              <a:t>7/31/26</a:t>
+              <a:t>9/3/26</a:t>
             </a:fld>
             <a:endParaRPr lang="en-US"/>
           </a:p>
@@ -1241,7 +1241,7 @@
           <a:p>
             <a:fld id="{87E01EA0-C669-8E49-B514-2D71DDB9C976}" type="datetimeFigureOut">
               <a:rPr lang="en-US" smtClean="0"/>
-              <a:t>7/31/26</a:t>
+              <a:t>9/3/26</a:t>
             </a:fld>
             <a:endParaRPr lang="en-US"/>
           </a:p>
@@ -1608,7 +1608,7 @@
           <a:p>
             <a:fld id="{87E01EA0-C669-8E49-B514-2D71DDB9C976}" type="datetimeFigureOut">
               <a:rPr lang="en-US" smtClean="0"/>
-              <a:t>7/31/26</a:t>
+              <a:t>9/3/26</a:t>
             </a:fld>
             <a:endParaRPr lang="en-US"/>
           </a:p>
@@ -1726,7 +1726,7 @@
           <a:p>
             <a:fld id="{87E01EA0-C669-8E49-B514-2D71DDB9C976}" type="datetimeFigureOut">
               <a:rPr lang="en-US" smtClean="0"/>
-              <a:t>7/31/26</a:t>
+              <a:t>9/3/26</a:t>
             </a:fld>
             <a:endParaRPr lang="en-US"/>
           </a:p>
@@ -1821,7 +1821,7 @@
           <a:p>
             <a:fld id="{87E01EA0-C669-8E49-B514-2D71DDB9C976}" type="datetimeFigureOut">
               <a:rPr lang="en-US" smtClean="0"/>
-              <a:t>7/31/26</a:t>
+              <a:t>9/3/26</a:t>
             </a:fld>
             <a:endParaRPr lang="en-US"/>
           </a:p>
@@ -2098,7 +2098,7 @@
           <a:p>
             <a:fld id="{87E01EA0-C669-8E49-B514-2D71DDB9C976}" type="datetimeFigureOut">
               <a:rPr lang="en-US" smtClean="0"/>
-              <a:t>7/31/26</a:t>
+              <a:t>9/3/26</a:t>
             </a:fld>
             <a:endParaRPr lang="en-US"/>
           </a:p>
@@ -2355,7 +2355,7 @@
           <a:p>
             <a:fld id="{87E01EA0-C669-8E49-B514-2D71DDB9C976}" type="datetimeFigureOut">
               <a:rPr lang="en-US" smtClean="0"/>
-              <a:t>7/31/26</a:t>
+              <a:t>9/3/26</a:t>
             </a:fld>
             <a:endParaRPr lang="en-US"/>
           </a:p>
@@ -2568,7 +2568,7 @@
           <a:p>
             <a:fld id="{87E01EA0-C669-8E49-B514-2D71DDB9C976}" type="datetimeFigureOut">
               <a:rPr lang="en-US" smtClean="0"/>
-              <a:t>7/31/26</a:t>
+              <a:t>9/3/26</a:t>
             </a:fld>
             <a:endParaRPr lang="en-US"/>
           </a:p>
@@ -2975,10 +2975,10 @@
       </p:grpSpPr>
       <p:pic>
         <p:nvPicPr>
-          <p:cNvPr id="24" name="Picture 23">
+          <p:cNvPr id="6" name="Picture 5">
             <a:extLst>
               <a:ext uri="{FF2B5EF4-FFF2-40B4-BE49-F238E27FC236}">
-                <a16:creationId xmlns:a16="http://schemas.microsoft.com/office/drawing/2014/main" id="{FA691B69-2900-152B-8407-D4AA6768B3C0}"/>
+                <a16:creationId xmlns:a16="http://schemas.microsoft.com/office/drawing/2014/main" id="{008CD06C-7DE3-5339-1205-7F8BCDC39918}"/>
               </a:ext>
             </a:extLst>
           </p:cNvPr>
@@ -2995,8 +2995,8 @@
         </p:blipFill>
         <p:spPr>
           <a:xfrm>
-            <a:off x="335081" y="27214"/>
-            <a:ext cx="2020660" cy="1469571"/>
+            <a:off x="2599126" y="7237779"/>
+            <a:ext cx="1579967" cy="1228863"/>
           </a:xfrm>
           <a:prstGeom prst="rect">
             <a:avLst/>
@@ -3025,8 +3025,8 @@
         </p:blipFill>
         <p:spPr>
           <a:xfrm>
-            <a:off x="195947" y="1618582"/>
-            <a:ext cx="2159794" cy="1533187"/>
+            <a:off x="2362047" y="252714"/>
+            <a:ext cx="1954081" cy="1387156"/>
           </a:xfrm>
           <a:prstGeom prst="rect">
             <a:avLst/>
@@ -3055,7 +3055,7 @@
         </p:blipFill>
         <p:spPr>
           <a:xfrm>
-            <a:off x="180181" y="5806262"/>
+            <a:off x="81041" y="4311853"/>
             <a:ext cx="4319588" cy="1254426"/>
           </a:xfrm>
           <a:prstGeom prst="rect">
@@ -3085,7 +3085,7 @@
         </p:blipFill>
         <p:spPr>
           <a:xfrm>
-            <a:off x="195947" y="3273566"/>
+            <a:off x="96807" y="1779157"/>
             <a:ext cx="4319588" cy="2325932"/>
           </a:xfrm>
           <a:prstGeom prst="rect">
@@ -3177,7 +3177,7 @@
         </p:nvSpPr>
         <p:spPr>
           <a:xfrm>
-            <a:off x="-3126" y="3079351"/>
+            <a:off x="56679" y="4206572"/>
             <a:ext cx="335081" cy="276999"/>
           </a:xfrm>
           <a:prstGeom prst="rect">
@@ -3194,41 +3194,6 @@
             <a:r>
               <a:rPr lang="en-US" sz="1200" dirty="0"/>
               <a:t>c</a:t>
-            </a:r>
-          </a:p>
-        </p:txBody>
-      </p:sp>
-      <p:sp>
-        <p:nvSpPr>
-          <p:cNvPr id="33" name="TextBox 32">
-            <a:extLst>
-              <a:ext uri="{FF2B5EF4-FFF2-40B4-BE49-F238E27FC236}">
-                <a16:creationId xmlns:a16="http://schemas.microsoft.com/office/drawing/2014/main" id="{13F3B3F8-EC2C-0EFB-7019-CDCCD0FCCA44}"/>
-              </a:ext>
-            </a:extLst>
-          </p:cNvPr>
-          <p:cNvSpPr txBox="1"/>
-          <p:nvPr/>
-        </p:nvSpPr>
-        <p:spPr>
-          <a:xfrm>
-            <a:off x="-3127" y="5667762"/>
-            <a:ext cx="335081" cy="276999"/>
-          </a:xfrm>
-          <a:prstGeom prst="rect">
-            <a:avLst/>
-          </a:prstGeom>
-          <a:noFill/>
-        </p:spPr>
-        <p:txBody>
-          <a:bodyPr wrap="square" rtlCol="0">
-            <a:spAutoFit/>
-          </a:bodyPr>
-          <a:lstStyle/>
-          <a:p>
-            <a:r>
-              <a:rPr lang="en-US" sz="1200" dirty="0"/>
-              <a:t>d</a:t>
             </a:r>
           </a:p>
         </p:txBody>
@@ -3290,7 +3255,7 @@
         </p:blipFill>
         <p:spPr>
           <a:xfrm>
-            <a:off x="96012" y="7339263"/>
+            <a:off x="81041" y="5730341"/>
             <a:ext cx="3141520" cy="1254426"/>
           </a:xfrm>
           <a:prstGeom prst="rect">
@@ -3298,6 +3263,136 @@
           </a:prstGeom>
         </p:spPr>
       </p:pic>
+      <p:pic>
+        <p:nvPicPr>
+          <p:cNvPr id="3" name="Picture 2">
+            <a:extLst>
+              <a:ext uri="{FF2B5EF4-FFF2-40B4-BE49-F238E27FC236}">
+                <a16:creationId xmlns:a16="http://schemas.microsoft.com/office/drawing/2014/main" id="{052B2533-B09A-6D0E-2B2C-F8C5435F2AF2}"/>
+              </a:ext>
+            </a:extLst>
+          </p:cNvPr>
+          <p:cNvPicPr>
+            <a:picLocks noChangeAspect="1"/>
+          </p:cNvPicPr>
+          <p:nvPr/>
+        </p:nvPicPr>
+        <p:blipFill>
+          <a:blip r:embed="rId7"/>
+          <a:stretch>
+            <a:fillRect/>
+          </a:stretch>
+        </p:blipFill>
+        <p:spPr>
+          <a:xfrm>
+            <a:off x="232813" y="211584"/>
+            <a:ext cx="1849541" cy="1387156"/>
+          </a:xfrm>
+          <a:prstGeom prst="rect">
+            <a:avLst/>
+          </a:prstGeom>
+        </p:spPr>
+      </p:pic>
+      <p:sp>
+        <p:nvSpPr>
+          <p:cNvPr id="33" name="TextBox 32">
+            <a:extLst>
+              <a:ext uri="{FF2B5EF4-FFF2-40B4-BE49-F238E27FC236}">
+                <a16:creationId xmlns:a16="http://schemas.microsoft.com/office/drawing/2014/main" id="{13F3B3F8-EC2C-0EFB-7019-CDCCD0FCCA44}"/>
+              </a:ext>
+            </a:extLst>
+          </p:cNvPr>
+          <p:cNvSpPr txBox="1"/>
+          <p:nvPr/>
+        </p:nvSpPr>
+        <p:spPr>
+          <a:xfrm>
+            <a:off x="0" y="5567855"/>
+            <a:ext cx="335081" cy="276999"/>
+          </a:xfrm>
+          <a:prstGeom prst="rect">
+            <a:avLst/>
+          </a:prstGeom>
+          <a:noFill/>
+        </p:spPr>
+        <p:txBody>
+          <a:bodyPr wrap="square" rtlCol="0">
+            <a:spAutoFit/>
+          </a:bodyPr>
+          <a:lstStyle/>
+          <a:p>
+            <a:r>
+              <a:rPr lang="en-US" sz="1200" dirty="0"/>
+              <a:t>d</a:t>
+            </a:r>
+          </a:p>
+        </p:txBody>
+      </p:sp>
+      <p:pic>
+        <p:nvPicPr>
+          <p:cNvPr id="9" name="Picture 8">
+            <a:extLst>
+              <a:ext uri="{FF2B5EF4-FFF2-40B4-BE49-F238E27FC236}">
+                <a16:creationId xmlns:a16="http://schemas.microsoft.com/office/drawing/2014/main" id="{5CA22257-412B-C5F5-689C-5EE62513E1BD}"/>
+              </a:ext>
+            </a:extLst>
+          </p:cNvPr>
+          <p:cNvPicPr>
+            <a:picLocks noChangeAspect="1"/>
+          </p:cNvPicPr>
+          <p:nvPr/>
+        </p:nvPicPr>
+        <p:blipFill>
+          <a:blip r:embed="rId8"/>
+          <a:stretch>
+            <a:fillRect/>
+          </a:stretch>
+        </p:blipFill>
+        <p:spPr>
+          <a:xfrm>
+            <a:off x="224219" y="7296188"/>
+            <a:ext cx="1392472" cy="1112044"/>
+          </a:xfrm>
+          <a:prstGeom prst="rect">
+            <a:avLst/>
+          </a:prstGeom>
+        </p:spPr>
+      </p:pic>
+      <p:sp>
+        <p:nvSpPr>
+          <p:cNvPr id="10" name="TextBox 9">
+            <a:extLst>
+              <a:ext uri="{FF2B5EF4-FFF2-40B4-BE49-F238E27FC236}">
+                <a16:creationId xmlns:a16="http://schemas.microsoft.com/office/drawing/2014/main" id="{152D0C2B-045E-AED2-B156-7699E8D124BA}"/>
+              </a:ext>
+            </a:extLst>
+          </p:cNvPr>
+          <p:cNvSpPr txBox="1"/>
+          <p:nvPr/>
+        </p:nvSpPr>
+        <p:spPr>
+          <a:xfrm>
+            <a:off x="2362047" y="7100440"/>
+            <a:ext cx="335081" cy="276999"/>
+          </a:xfrm>
+          <a:prstGeom prst="rect">
+            <a:avLst/>
+          </a:prstGeom>
+          <a:noFill/>
+        </p:spPr>
+        <p:txBody>
+          <a:bodyPr wrap="square" rtlCol="0">
+            <a:spAutoFit/>
+          </a:bodyPr>
+          <a:lstStyle/>
+          <a:p>
+            <a:r>
+              <a:rPr lang="en-US" sz="1200" dirty="0"/>
+              <a:t>f</a:t>
+            </a:r>
+          </a:p>
+        </p:txBody>
+      </p:sp>
     </p:spTree>
     <p:extLst>
       <p:ext uri="{BB962C8B-B14F-4D97-AF65-F5344CB8AC3E}">
